--- a/testcases/media-background.pptx
+++ b/testcases/media-background.pptx
@@ -132,7 +132,7 @@
           <p:cNvPr id="2" name="标题 1">
             <a:extLst>
               <a:ext uri="{FF2B5EF4-FFF2-40B4-BE49-F238E27FC236}">
-                <a16:creationId xmlns:a16="http://schemas.microsoft.com/office/drawing/2014/main" id="{45B2965A-254E-48EA-B9CD-D097434147DE}"/>
+                <a16:creationId xmlns:a16="http://schemas.microsoft.com/office/drawing/2014/main" id="{36DCCF8E-A28E-9F8C-936E-A1C3FA1E2C90}"/>
               </a:ext>
             </a:extLst>
           </p:cNvPr>
@@ -169,7 +169,7 @@
           <p:cNvPr id="3" name="副标题 2">
             <a:extLst>
               <a:ext uri="{FF2B5EF4-FFF2-40B4-BE49-F238E27FC236}">
-                <a16:creationId xmlns:a16="http://schemas.microsoft.com/office/drawing/2014/main" id="{A67E0807-14D4-3A6B-BCD5-8E641037DAF6}"/>
+                <a16:creationId xmlns:a16="http://schemas.microsoft.com/office/drawing/2014/main" id="{4484BFB4-F74B-CEBE-BCB8-E4D0D82F69DB}"/>
               </a:ext>
             </a:extLst>
           </p:cNvPr>
@@ -239,7 +239,7 @@
           <p:cNvPr id="4" name="日期占位符 3">
             <a:extLst>
               <a:ext uri="{FF2B5EF4-FFF2-40B4-BE49-F238E27FC236}">
-                <a16:creationId xmlns:a16="http://schemas.microsoft.com/office/drawing/2014/main" id="{523B0D5C-5C0E-F0F9-A772-4E03047E7ADA}"/>
+                <a16:creationId xmlns:a16="http://schemas.microsoft.com/office/drawing/2014/main" id="{17BA0004-4510-451A-3710-6EFBDED3536D}"/>
               </a:ext>
             </a:extLst>
           </p:cNvPr>
@@ -255,7 +255,7 @@
           <a:bodyPr/>
           <a:lstStyle/>
           <a:p>
-            <a:fld id="{6186168D-8DF3-47FC-AB94-349ED6DF78D0}" type="datetimeFigureOut">
+            <a:fld id="{02B252FC-AA1C-4F1E-9721-828FAE4A4236}" type="datetimeFigureOut">
               <a:rPr lang="zh-CN" altLang="en-US" smtClean="0"/>
               <a:t>2026/10/13</a:t>
             </a:fld>
@@ -268,7 +268,7 @@
           <p:cNvPr id="5" name="页脚占位符 4">
             <a:extLst>
               <a:ext uri="{FF2B5EF4-FFF2-40B4-BE49-F238E27FC236}">
-                <a16:creationId xmlns:a16="http://schemas.microsoft.com/office/drawing/2014/main" id="{F4211438-CA53-52C7-E1FC-DF3520E9EC0B}"/>
+                <a16:creationId xmlns:a16="http://schemas.microsoft.com/office/drawing/2014/main" id="{4038B0A7-C07C-9942-2872-BF430B389D79}"/>
               </a:ext>
             </a:extLst>
           </p:cNvPr>
@@ -293,7 +293,7 @@
           <p:cNvPr id="6" name="灯片编号占位符 5">
             <a:extLst>
               <a:ext uri="{FF2B5EF4-FFF2-40B4-BE49-F238E27FC236}">
-                <a16:creationId xmlns:a16="http://schemas.microsoft.com/office/drawing/2014/main" id="{55CD6FD6-A0D6-850C-6B59-C721CDDF6CF7}"/>
+                <a16:creationId xmlns:a16="http://schemas.microsoft.com/office/drawing/2014/main" id="{95C5728F-4709-D578-0CCD-E3499459101D}"/>
               </a:ext>
             </a:extLst>
           </p:cNvPr>
@@ -309,7 +309,7 @@
           <a:bodyPr/>
           <a:lstStyle/>
           <a:p>
-            <a:fld id="{B2ECA510-1031-4F61-8417-A119E1D3780D}" type="slidenum">
+            <a:fld id="{35817C98-D1C8-48AD-A323-35CFC4E74D14}" type="slidenum">
               <a:rPr lang="zh-CN" altLang="en-US" smtClean="0"/>
               <a:t>‹#›</a:t>
             </a:fld>
@@ -320,7 +320,7 @@
     </p:spTree>
     <p:extLst>
       <p:ext uri="{BB962C8B-B14F-4D97-AF65-F5344CB8AC3E}">
-        <p14:creationId xmlns:p14="http://schemas.microsoft.com/office/powerpoint/2010/main" val="1456910968"/>
+        <p14:creationId xmlns:p14="http://schemas.microsoft.com/office/powerpoint/2010/main" val="1665518810"/>
       </p:ext>
     </p:extLst>
   </p:cSld>
@@ -352,7 +352,7 @@
           <p:cNvPr id="2" name="标题 1">
             <a:extLst>
               <a:ext uri="{FF2B5EF4-FFF2-40B4-BE49-F238E27FC236}">
-                <a16:creationId xmlns:a16="http://schemas.microsoft.com/office/drawing/2014/main" id="{157424C7-B1A5-6CB0-171E-4C9657EDEA1B}"/>
+                <a16:creationId xmlns:a16="http://schemas.microsoft.com/office/drawing/2014/main" id="{0C5FFD21-77F3-D657-8111-54111D743533}"/>
               </a:ext>
             </a:extLst>
           </p:cNvPr>
@@ -380,7 +380,7 @@
           <p:cNvPr id="3" name="竖排文字占位符 2">
             <a:extLst>
               <a:ext uri="{FF2B5EF4-FFF2-40B4-BE49-F238E27FC236}">
-                <a16:creationId xmlns:a16="http://schemas.microsoft.com/office/drawing/2014/main" id="{742F68C1-986E-4D2A-F4A1-B89334CD53E8}"/>
+                <a16:creationId xmlns:a16="http://schemas.microsoft.com/office/drawing/2014/main" id="{24221D5A-4093-1B42-9AFC-4FE35760D1EB}"/>
               </a:ext>
             </a:extLst>
           </p:cNvPr>
@@ -437,7 +437,7 @@
           <p:cNvPr id="4" name="日期占位符 3">
             <a:extLst>
               <a:ext uri="{FF2B5EF4-FFF2-40B4-BE49-F238E27FC236}">
-                <a16:creationId xmlns:a16="http://schemas.microsoft.com/office/drawing/2014/main" id="{2A40CB0C-878A-D120-9883-E90503219E47}"/>
+                <a16:creationId xmlns:a16="http://schemas.microsoft.com/office/drawing/2014/main" id="{B5F13D28-F434-C4F7-97B8-D8C30F992D9B}"/>
               </a:ext>
             </a:extLst>
           </p:cNvPr>
@@ -453,7 +453,7 @@
           <a:bodyPr/>
           <a:lstStyle/>
           <a:p>
-            <a:fld id="{6186168D-8DF3-47FC-AB94-349ED6DF78D0}" type="datetimeFigureOut">
+            <a:fld id="{02B252FC-AA1C-4F1E-9721-828FAE4A4236}" type="datetimeFigureOut">
               <a:rPr lang="zh-CN" altLang="en-US" smtClean="0"/>
               <a:t>2026/10/13</a:t>
             </a:fld>
@@ -466,7 +466,7 @@
           <p:cNvPr id="5" name="页脚占位符 4">
             <a:extLst>
               <a:ext uri="{FF2B5EF4-FFF2-40B4-BE49-F238E27FC236}">
-                <a16:creationId xmlns:a16="http://schemas.microsoft.com/office/drawing/2014/main" id="{E823AE2F-2BF4-DCA0-90A6-29DED6205F0E}"/>
+                <a16:creationId xmlns:a16="http://schemas.microsoft.com/office/drawing/2014/main" id="{4D3218D2-14DC-8EE2-2555-57B4B46EABC8}"/>
               </a:ext>
             </a:extLst>
           </p:cNvPr>
@@ -491,7 +491,7 @@
           <p:cNvPr id="6" name="灯片编号占位符 5">
             <a:extLst>
               <a:ext uri="{FF2B5EF4-FFF2-40B4-BE49-F238E27FC236}">
-                <a16:creationId xmlns:a16="http://schemas.microsoft.com/office/drawing/2014/main" id="{68342C20-8A91-B99A-4623-C2028D738292}"/>
+                <a16:creationId xmlns:a16="http://schemas.microsoft.com/office/drawing/2014/main" id="{4284E973-B17F-38ED-47A6-4DF06F858F72}"/>
               </a:ext>
             </a:extLst>
           </p:cNvPr>
@@ -507,7 +507,7 @@
           <a:bodyPr/>
           <a:lstStyle/>
           <a:p>
-            <a:fld id="{B2ECA510-1031-4F61-8417-A119E1D3780D}" type="slidenum">
+            <a:fld id="{35817C98-D1C8-48AD-A323-35CFC4E74D14}" type="slidenum">
               <a:rPr lang="zh-CN" altLang="en-US" smtClean="0"/>
               <a:t>‹#›</a:t>
             </a:fld>
@@ -518,7 +518,7 @@
     </p:spTree>
     <p:extLst>
       <p:ext uri="{BB962C8B-B14F-4D97-AF65-F5344CB8AC3E}">
-        <p14:creationId xmlns:p14="http://schemas.microsoft.com/office/powerpoint/2010/main" val="1278926924"/>
+        <p14:creationId xmlns:p14="http://schemas.microsoft.com/office/powerpoint/2010/main" val="3717126639"/>
       </p:ext>
     </p:extLst>
   </p:cSld>
@@ -550,7 +550,7 @@
           <p:cNvPr id="2" name="竖排标题 1">
             <a:extLst>
               <a:ext uri="{FF2B5EF4-FFF2-40B4-BE49-F238E27FC236}">
-                <a16:creationId xmlns:a16="http://schemas.microsoft.com/office/drawing/2014/main" id="{E5A04A34-A9AA-7E61-42FF-24AB9676EC35}"/>
+                <a16:creationId xmlns:a16="http://schemas.microsoft.com/office/drawing/2014/main" id="{114FD397-62F5-49FE-0307-68EAA2850CE4}"/>
               </a:ext>
             </a:extLst>
           </p:cNvPr>
@@ -583,7 +583,7 @@
           <p:cNvPr id="3" name="竖排文字占位符 2">
             <a:extLst>
               <a:ext uri="{FF2B5EF4-FFF2-40B4-BE49-F238E27FC236}">
-                <a16:creationId xmlns:a16="http://schemas.microsoft.com/office/drawing/2014/main" id="{A7EE9EC5-6557-6006-CB57-008E063F443A}"/>
+                <a16:creationId xmlns:a16="http://schemas.microsoft.com/office/drawing/2014/main" id="{C844DD4B-A354-D46E-8537-31C6253D3300}"/>
               </a:ext>
             </a:extLst>
           </p:cNvPr>
@@ -645,7 +645,7 @@
           <p:cNvPr id="4" name="日期占位符 3">
             <a:extLst>
               <a:ext uri="{FF2B5EF4-FFF2-40B4-BE49-F238E27FC236}">
-                <a16:creationId xmlns:a16="http://schemas.microsoft.com/office/drawing/2014/main" id="{076AB60D-C63F-D979-557C-A3A5A98D6525}"/>
+                <a16:creationId xmlns:a16="http://schemas.microsoft.com/office/drawing/2014/main" id="{E662C86B-E9AB-51CA-6EB4-FDC2EC1D7476}"/>
               </a:ext>
             </a:extLst>
           </p:cNvPr>
@@ -661,7 +661,7 @@
           <a:bodyPr/>
           <a:lstStyle/>
           <a:p>
-            <a:fld id="{6186168D-8DF3-47FC-AB94-349ED6DF78D0}" type="datetimeFigureOut">
+            <a:fld id="{02B252FC-AA1C-4F1E-9721-828FAE4A4236}" type="datetimeFigureOut">
               <a:rPr lang="zh-CN" altLang="en-US" smtClean="0"/>
               <a:t>2026/10/13</a:t>
             </a:fld>
@@ -674,7 +674,7 @@
           <p:cNvPr id="5" name="页脚占位符 4">
             <a:extLst>
               <a:ext uri="{FF2B5EF4-FFF2-40B4-BE49-F238E27FC236}">
-                <a16:creationId xmlns:a16="http://schemas.microsoft.com/office/drawing/2014/main" id="{C5F50537-A342-D891-1E39-85E7592FE5D9}"/>
+                <a16:creationId xmlns:a16="http://schemas.microsoft.com/office/drawing/2014/main" id="{C5171288-C371-FB13-BD12-34535323D05F}"/>
               </a:ext>
             </a:extLst>
           </p:cNvPr>
@@ -699,7 +699,7 @@
           <p:cNvPr id="6" name="灯片编号占位符 5">
             <a:extLst>
               <a:ext uri="{FF2B5EF4-FFF2-40B4-BE49-F238E27FC236}">
-                <a16:creationId xmlns:a16="http://schemas.microsoft.com/office/drawing/2014/main" id="{387CA2FB-C582-9934-B535-10B42C445F84}"/>
+                <a16:creationId xmlns:a16="http://schemas.microsoft.com/office/drawing/2014/main" id="{853B4EAD-4770-3106-EFA8-A0132E8702F3}"/>
               </a:ext>
             </a:extLst>
           </p:cNvPr>
@@ -715,7 +715,7 @@
           <a:bodyPr/>
           <a:lstStyle/>
           <a:p>
-            <a:fld id="{B2ECA510-1031-4F61-8417-A119E1D3780D}" type="slidenum">
+            <a:fld id="{35817C98-D1C8-48AD-A323-35CFC4E74D14}" type="slidenum">
               <a:rPr lang="zh-CN" altLang="en-US" smtClean="0"/>
               <a:t>‹#›</a:t>
             </a:fld>
@@ -726,7 +726,7 @@
     </p:spTree>
     <p:extLst>
       <p:ext uri="{BB962C8B-B14F-4D97-AF65-F5344CB8AC3E}">
-        <p14:creationId xmlns:p14="http://schemas.microsoft.com/office/powerpoint/2010/main" val="4184670023"/>
+        <p14:creationId xmlns:p14="http://schemas.microsoft.com/office/powerpoint/2010/main" val="1903141018"/>
       </p:ext>
     </p:extLst>
   </p:cSld>
@@ -758,7 +758,7 @@
           <p:cNvPr id="2" name="标题 1">
             <a:extLst>
               <a:ext uri="{FF2B5EF4-FFF2-40B4-BE49-F238E27FC236}">
-                <a16:creationId xmlns:a16="http://schemas.microsoft.com/office/drawing/2014/main" id="{DA54AD24-85F0-DE25-6E96-0E70FD385B49}"/>
+                <a16:creationId xmlns:a16="http://schemas.microsoft.com/office/drawing/2014/main" id="{94945A2E-0927-0A94-A8CE-836D1843DB32}"/>
               </a:ext>
             </a:extLst>
           </p:cNvPr>
@@ -786,7 +786,7 @@
           <p:cNvPr id="3" name="内容占位符 2">
             <a:extLst>
               <a:ext uri="{FF2B5EF4-FFF2-40B4-BE49-F238E27FC236}">
-                <a16:creationId xmlns:a16="http://schemas.microsoft.com/office/drawing/2014/main" id="{C1C5BF97-866A-BC86-A467-F1D2F04CA7A1}"/>
+                <a16:creationId xmlns:a16="http://schemas.microsoft.com/office/drawing/2014/main" id="{3CCF2CC3-2E56-4E84-6CCF-6F365E4BC8F7}"/>
               </a:ext>
             </a:extLst>
           </p:cNvPr>
@@ -843,7 +843,7 @@
           <p:cNvPr id="4" name="日期占位符 3">
             <a:extLst>
               <a:ext uri="{FF2B5EF4-FFF2-40B4-BE49-F238E27FC236}">
-                <a16:creationId xmlns:a16="http://schemas.microsoft.com/office/drawing/2014/main" id="{3B16EFF6-D9C1-77DB-0C69-AC93C638887C}"/>
+                <a16:creationId xmlns:a16="http://schemas.microsoft.com/office/drawing/2014/main" id="{CF7931DF-DDDD-B5FE-6E85-87E7053B87B1}"/>
               </a:ext>
             </a:extLst>
           </p:cNvPr>
@@ -859,7 +859,7 @@
           <a:bodyPr/>
           <a:lstStyle/>
           <a:p>
-            <a:fld id="{6186168D-8DF3-47FC-AB94-349ED6DF78D0}" type="datetimeFigureOut">
+            <a:fld id="{02B252FC-AA1C-4F1E-9721-828FAE4A4236}" type="datetimeFigureOut">
               <a:rPr lang="zh-CN" altLang="en-US" smtClean="0"/>
               <a:t>2026/10/13</a:t>
             </a:fld>
@@ -872,7 +872,7 @@
           <p:cNvPr id="5" name="页脚占位符 4">
             <a:extLst>
               <a:ext uri="{FF2B5EF4-FFF2-40B4-BE49-F238E27FC236}">
-                <a16:creationId xmlns:a16="http://schemas.microsoft.com/office/drawing/2014/main" id="{53D86A12-B773-8D21-1886-3D46D789D734}"/>
+                <a16:creationId xmlns:a16="http://schemas.microsoft.com/office/drawing/2014/main" id="{9CBD032F-EE90-822D-ABE7-91B191AEED6C}"/>
               </a:ext>
             </a:extLst>
           </p:cNvPr>
@@ -897,7 +897,7 @@
           <p:cNvPr id="6" name="灯片编号占位符 5">
             <a:extLst>
               <a:ext uri="{FF2B5EF4-FFF2-40B4-BE49-F238E27FC236}">
-                <a16:creationId xmlns:a16="http://schemas.microsoft.com/office/drawing/2014/main" id="{CD092BA9-03EE-C02C-1EBE-4585B83A6AED}"/>
+                <a16:creationId xmlns:a16="http://schemas.microsoft.com/office/drawing/2014/main" id="{140E9989-AE3A-9B43-B6C1-14754F56BA7A}"/>
               </a:ext>
             </a:extLst>
           </p:cNvPr>
@@ -913,7 +913,7 @@
           <a:bodyPr/>
           <a:lstStyle/>
           <a:p>
-            <a:fld id="{B2ECA510-1031-4F61-8417-A119E1D3780D}" type="slidenum">
+            <a:fld id="{35817C98-D1C8-48AD-A323-35CFC4E74D14}" type="slidenum">
               <a:rPr lang="zh-CN" altLang="en-US" smtClean="0"/>
               <a:t>‹#›</a:t>
             </a:fld>
@@ -924,7 +924,7 @@
     </p:spTree>
     <p:extLst>
       <p:ext uri="{BB962C8B-B14F-4D97-AF65-F5344CB8AC3E}">
-        <p14:creationId xmlns:p14="http://schemas.microsoft.com/office/powerpoint/2010/main" val="3610816511"/>
+        <p14:creationId xmlns:p14="http://schemas.microsoft.com/office/powerpoint/2010/main" val="4250088342"/>
       </p:ext>
     </p:extLst>
   </p:cSld>
@@ -956,7 +956,7 @@
           <p:cNvPr id="2" name="标题 1">
             <a:extLst>
               <a:ext uri="{FF2B5EF4-FFF2-40B4-BE49-F238E27FC236}">
-                <a16:creationId xmlns:a16="http://schemas.microsoft.com/office/drawing/2014/main" id="{7A4D52CD-7AF3-1D3A-E7BC-1677534AC77A}"/>
+                <a16:creationId xmlns:a16="http://schemas.microsoft.com/office/drawing/2014/main" id="{90BBDDCE-4066-7ECE-A0F9-16893C896480}"/>
               </a:ext>
             </a:extLst>
           </p:cNvPr>
@@ -993,7 +993,7 @@
           <p:cNvPr id="3" name="文本占位符 2">
             <a:extLst>
               <a:ext uri="{FF2B5EF4-FFF2-40B4-BE49-F238E27FC236}">
-                <a16:creationId xmlns:a16="http://schemas.microsoft.com/office/drawing/2014/main" id="{BDEC985E-5832-669E-FEEE-3DF374982927}"/>
+                <a16:creationId xmlns:a16="http://schemas.microsoft.com/office/drawing/2014/main" id="{2C569195-D410-2189-6970-7A3B5A736414}"/>
               </a:ext>
             </a:extLst>
           </p:cNvPr>
@@ -1118,7 +1118,7 @@
           <p:cNvPr id="4" name="日期占位符 3">
             <a:extLst>
               <a:ext uri="{FF2B5EF4-FFF2-40B4-BE49-F238E27FC236}">
-                <a16:creationId xmlns:a16="http://schemas.microsoft.com/office/drawing/2014/main" id="{343FA19F-204B-ECBC-C343-7A6501ABE2AC}"/>
+                <a16:creationId xmlns:a16="http://schemas.microsoft.com/office/drawing/2014/main" id="{99E9809D-FE5B-4472-0623-04C2B1F480C4}"/>
               </a:ext>
             </a:extLst>
           </p:cNvPr>
@@ -1134,7 +1134,7 @@
           <a:bodyPr/>
           <a:lstStyle/>
           <a:p>
-            <a:fld id="{6186168D-8DF3-47FC-AB94-349ED6DF78D0}" type="datetimeFigureOut">
+            <a:fld id="{02B252FC-AA1C-4F1E-9721-828FAE4A4236}" type="datetimeFigureOut">
               <a:rPr lang="zh-CN" altLang="en-US" smtClean="0"/>
               <a:t>2026/10/13</a:t>
             </a:fld>
@@ -1147,7 +1147,7 @@
           <p:cNvPr id="5" name="页脚占位符 4">
             <a:extLst>
               <a:ext uri="{FF2B5EF4-FFF2-40B4-BE49-F238E27FC236}">
-                <a16:creationId xmlns:a16="http://schemas.microsoft.com/office/drawing/2014/main" id="{86EF09E5-895C-5E0E-2CE5-479258531859}"/>
+                <a16:creationId xmlns:a16="http://schemas.microsoft.com/office/drawing/2014/main" id="{237A706E-99AC-3E5E-DE00-8A936B8803BF}"/>
               </a:ext>
             </a:extLst>
           </p:cNvPr>
@@ -1172,7 +1172,7 @@
           <p:cNvPr id="6" name="灯片编号占位符 5">
             <a:extLst>
               <a:ext uri="{FF2B5EF4-FFF2-40B4-BE49-F238E27FC236}">
-                <a16:creationId xmlns:a16="http://schemas.microsoft.com/office/drawing/2014/main" id="{6E9D2A3C-27AF-0F56-7C5E-0544647D3685}"/>
+                <a16:creationId xmlns:a16="http://schemas.microsoft.com/office/drawing/2014/main" id="{3F4228EC-3D01-9435-E3DD-320444C04014}"/>
               </a:ext>
             </a:extLst>
           </p:cNvPr>
@@ -1188,7 +1188,7 @@
           <a:bodyPr/>
           <a:lstStyle/>
           <a:p>
-            <a:fld id="{B2ECA510-1031-4F61-8417-A119E1D3780D}" type="slidenum">
+            <a:fld id="{35817C98-D1C8-48AD-A323-35CFC4E74D14}" type="slidenum">
               <a:rPr lang="zh-CN" altLang="en-US" smtClean="0"/>
               <a:t>‹#›</a:t>
             </a:fld>
@@ -1199,7 +1199,7 @@
     </p:spTree>
     <p:extLst>
       <p:ext uri="{BB962C8B-B14F-4D97-AF65-F5344CB8AC3E}">
-        <p14:creationId xmlns:p14="http://schemas.microsoft.com/office/powerpoint/2010/main" val="4234956153"/>
+        <p14:creationId xmlns:p14="http://schemas.microsoft.com/office/powerpoint/2010/main" val="2849087951"/>
       </p:ext>
     </p:extLst>
   </p:cSld>
@@ -1231,7 +1231,7 @@
           <p:cNvPr id="2" name="标题 1">
             <a:extLst>
               <a:ext uri="{FF2B5EF4-FFF2-40B4-BE49-F238E27FC236}">
-                <a16:creationId xmlns:a16="http://schemas.microsoft.com/office/drawing/2014/main" id="{1C046EA1-BC3E-2A76-9F48-127516D02C86}"/>
+                <a16:creationId xmlns:a16="http://schemas.microsoft.com/office/drawing/2014/main" id="{123A0DF6-4663-1339-1D7E-5A948F378380}"/>
               </a:ext>
             </a:extLst>
           </p:cNvPr>
@@ -1259,7 +1259,7 @@
           <p:cNvPr id="3" name="内容占位符 2">
             <a:extLst>
               <a:ext uri="{FF2B5EF4-FFF2-40B4-BE49-F238E27FC236}">
-                <a16:creationId xmlns:a16="http://schemas.microsoft.com/office/drawing/2014/main" id="{8D3B0334-CEC0-4109-F288-8CCDCEBC0242}"/>
+                <a16:creationId xmlns:a16="http://schemas.microsoft.com/office/drawing/2014/main" id="{434945D2-B656-88F1-9346-4065CE127688}"/>
               </a:ext>
             </a:extLst>
           </p:cNvPr>
@@ -1321,7 +1321,7 @@
           <p:cNvPr id="4" name="内容占位符 3">
             <a:extLst>
               <a:ext uri="{FF2B5EF4-FFF2-40B4-BE49-F238E27FC236}">
-                <a16:creationId xmlns:a16="http://schemas.microsoft.com/office/drawing/2014/main" id="{A433F5CE-4470-67AD-06BA-D0DA437C6029}"/>
+                <a16:creationId xmlns:a16="http://schemas.microsoft.com/office/drawing/2014/main" id="{5133FFEF-CD58-163A-D3EB-2A1F46D38DF8}"/>
               </a:ext>
             </a:extLst>
           </p:cNvPr>
@@ -1383,7 +1383,7 @@
           <p:cNvPr id="5" name="日期占位符 4">
             <a:extLst>
               <a:ext uri="{FF2B5EF4-FFF2-40B4-BE49-F238E27FC236}">
-                <a16:creationId xmlns:a16="http://schemas.microsoft.com/office/drawing/2014/main" id="{02A270E3-B317-C7E4-BA01-85ECDDA25538}"/>
+                <a16:creationId xmlns:a16="http://schemas.microsoft.com/office/drawing/2014/main" id="{19535685-00C2-65D0-4E68-FB76FC7DF04E}"/>
               </a:ext>
             </a:extLst>
           </p:cNvPr>
@@ -1399,7 +1399,7 @@
           <a:bodyPr/>
           <a:lstStyle/>
           <a:p>
-            <a:fld id="{6186168D-8DF3-47FC-AB94-349ED6DF78D0}" type="datetimeFigureOut">
+            <a:fld id="{02B252FC-AA1C-4F1E-9721-828FAE4A4236}" type="datetimeFigureOut">
               <a:rPr lang="zh-CN" altLang="en-US" smtClean="0"/>
               <a:t>2026/10/13</a:t>
             </a:fld>
@@ -1412,7 +1412,7 @@
           <p:cNvPr id="6" name="页脚占位符 5">
             <a:extLst>
               <a:ext uri="{FF2B5EF4-FFF2-40B4-BE49-F238E27FC236}">
-                <a16:creationId xmlns:a16="http://schemas.microsoft.com/office/drawing/2014/main" id="{600662C9-FB3A-EB3B-15D2-811D5447B532}"/>
+                <a16:creationId xmlns:a16="http://schemas.microsoft.com/office/drawing/2014/main" id="{7E399191-B064-D21D-BA57-FFE06B1EC64F}"/>
               </a:ext>
             </a:extLst>
           </p:cNvPr>
@@ -1437,7 +1437,7 @@
           <p:cNvPr id="7" name="灯片编号占位符 6">
             <a:extLst>
               <a:ext uri="{FF2B5EF4-FFF2-40B4-BE49-F238E27FC236}">
-                <a16:creationId xmlns:a16="http://schemas.microsoft.com/office/drawing/2014/main" id="{D92A2FC9-0278-3612-2CA1-C11412D0A109}"/>
+                <a16:creationId xmlns:a16="http://schemas.microsoft.com/office/drawing/2014/main" id="{2C86C66B-E90C-98F5-C389-761324E4961B}"/>
               </a:ext>
             </a:extLst>
           </p:cNvPr>
@@ -1453,7 +1453,7 @@
           <a:bodyPr/>
           <a:lstStyle/>
           <a:p>
-            <a:fld id="{B2ECA510-1031-4F61-8417-A119E1D3780D}" type="slidenum">
+            <a:fld id="{35817C98-D1C8-48AD-A323-35CFC4E74D14}" type="slidenum">
               <a:rPr lang="zh-CN" altLang="en-US" smtClean="0"/>
               <a:t>‹#›</a:t>
             </a:fld>
@@ -1464,7 +1464,7 @@
     </p:spTree>
     <p:extLst>
       <p:ext uri="{BB962C8B-B14F-4D97-AF65-F5344CB8AC3E}">
-        <p14:creationId xmlns:p14="http://schemas.microsoft.com/office/powerpoint/2010/main" val="2754150056"/>
+        <p14:creationId xmlns:p14="http://schemas.microsoft.com/office/powerpoint/2010/main" val="392088300"/>
       </p:ext>
     </p:extLst>
   </p:cSld>
@@ -1496,7 +1496,7 @@
           <p:cNvPr id="2" name="标题 1">
             <a:extLst>
               <a:ext uri="{FF2B5EF4-FFF2-40B4-BE49-F238E27FC236}">
-                <a16:creationId xmlns:a16="http://schemas.microsoft.com/office/drawing/2014/main" id="{EDC5CF01-885A-37A7-1250-00D640C1F2A4}"/>
+                <a16:creationId xmlns:a16="http://schemas.microsoft.com/office/drawing/2014/main" id="{37314FA4-1D75-EC69-5C35-26AD386363A5}"/>
               </a:ext>
             </a:extLst>
           </p:cNvPr>
@@ -1529,7 +1529,7 @@
           <p:cNvPr id="3" name="文本占位符 2">
             <a:extLst>
               <a:ext uri="{FF2B5EF4-FFF2-40B4-BE49-F238E27FC236}">
-                <a16:creationId xmlns:a16="http://schemas.microsoft.com/office/drawing/2014/main" id="{31D247BF-E71A-7FC8-2876-A578461B0924}"/>
+                <a16:creationId xmlns:a16="http://schemas.microsoft.com/office/drawing/2014/main" id="{A737487F-1D95-42C1-62AD-F4478F54D24A}"/>
               </a:ext>
             </a:extLst>
           </p:cNvPr>
@@ -1600,7 +1600,7 @@
           <p:cNvPr id="4" name="内容占位符 3">
             <a:extLst>
               <a:ext uri="{FF2B5EF4-FFF2-40B4-BE49-F238E27FC236}">
-                <a16:creationId xmlns:a16="http://schemas.microsoft.com/office/drawing/2014/main" id="{DD05DE5A-8362-9558-1353-CFCEC5069918}"/>
+                <a16:creationId xmlns:a16="http://schemas.microsoft.com/office/drawing/2014/main" id="{4177E325-C5DD-DDF4-B243-AB3AC370FAC8}"/>
               </a:ext>
             </a:extLst>
           </p:cNvPr>
@@ -1662,7 +1662,7 @@
           <p:cNvPr id="5" name="文本占位符 4">
             <a:extLst>
               <a:ext uri="{FF2B5EF4-FFF2-40B4-BE49-F238E27FC236}">
-                <a16:creationId xmlns:a16="http://schemas.microsoft.com/office/drawing/2014/main" id="{6D538983-9824-E985-6FF9-44E335F67D78}"/>
+                <a16:creationId xmlns:a16="http://schemas.microsoft.com/office/drawing/2014/main" id="{32E25507-CAFC-7E2F-03A7-F146FE91EE83}"/>
               </a:ext>
             </a:extLst>
           </p:cNvPr>
@@ -1733,7 +1733,7 @@
           <p:cNvPr id="6" name="内容占位符 5">
             <a:extLst>
               <a:ext uri="{FF2B5EF4-FFF2-40B4-BE49-F238E27FC236}">
-                <a16:creationId xmlns:a16="http://schemas.microsoft.com/office/drawing/2014/main" id="{E02BB45D-A222-A19F-2B5A-5804BE617CF4}"/>
+                <a16:creationId xmlns:a16="http://schemas.microsoft.com/office/drawing/2014/main" id="{65A8CAF0-2787-809D-1F00-5B413163D066}"/>
               </a:ext>
             </a:extLst>
           </p:cNvPr>
@@ -1795,7 +1795,7 @@
           <p:cNvPr id="7" name="日期占位符 6">
             <a:extLst>
               <a:ext uri="{FF2B5EF4-FFF2-40B4-BE49-F238E27FC236}">
-                <a16:creationId xmlns:a16="http://schemas.microsoft.com/office/drawing/2014/main" id="{B8531F2F-6DFC-DDED-6072-4265ABB53203}"/>
+                <a16:creationId xmlns:a16="http://schemas.microsoft.com/office/drawing/2014/main" id="{7D2F8661-74D3-F9D2-8D27-8398959037AC}"/>
               </a:ext>
             </a:extLst>
           </p:cNvPr>
@@ -1811,7 +1811,7 @@
           <a:bodyPr/>
           <a:lstStyle/>
           <a:p>
-            <a:fld id="{6186168D-8DF3-47FC-AB94-349ED6DF78D0}" type="datetimeFigureOut">
+            <a:fld id="{02B252FC-AA1C-4F1E-9721-828FAE4A4236}" type="datetimeFigureOut">
               <a:rPr lang="zh-CN" altLang="en-US" smtClean="0"/>
               <a:t>2026/10/13</a:t>
             </a:fld>
@@ -1824,7 +1824,7 @@
           <p:cNvPr id="8" name="页脚占位符 7">
             <a:extLst>
               <a:ext uri="{FF2B5EF4-FFF2-40B4-BE49-F238E27FC236}">
-                <a16:creationId xmlns:a16="http://schemas.microsoft.com/office/drawing/2014/main" id="{5AD38AAF-2B6F-B785-C9A4-E90FC6A52FA7}"/>
+                <a16:creationId xmlns:a16="http://schemas.microsoft.com/office/drawing/2014/main" id="{B7F4C314-C631-AD54-FEA9-1E61D8F8A723}"/>
               </a:ext>
             </a:extLst>
           </p:cNvPr>
@@ -1849,7 +1849,7 @@
           <p:cNvPr id="9" name="灯片编号占位符 8">
             <a:extLst>
               <a:ext uri="{FF2B5EF4-FFF2-40B4-BE49-F238E27FC236}">
-                <a16:creationId xmlns:a16="http://schemas.microsoft.com/office/drawing/2014/main" id="{051B3CF5-80C6-72F9-93BD-35764A318F59}"/>
+                <a16:creationId xmlns:a16="http://schemas.microsoft.com/office/drawing/2014/main" id="{2DC6861E-C420-AD42-AF1A-F888BACFB4FA}"/>
               </a:ext>
             </a:extLst>
           </p:cNvPr>
@@ -1865,7 +1865,7 @@
           <a:bodyPr/>
           <a:lstStyle/>
           <a:p>
-            <a:fld id="{B2ECA510-1031-4F61-8417-A119E1D3780D}" type="slidenum">
+            <a:fld id="{35817C98-D1C8-48AD-A323-35CFC4E74D14}" type="slidenum">
               <a:rPr lang="zh-CN" altLang="en-US" smtClean="0"/>
               <a:t>‹#›</a:t>
             </a:fld>
@@ -1876,7 +1876,7 @@
     </p:spTree>
     <p:extLst>
       <p:ext uri="{BB962C8B-B14F-4D97-AF65-F5344CB8AC3E}">
-        <p14:creationId xmlns:p14="http://schemas.microsoft.com/office/powerpoint/2010/main" val="1832370651"/>
+        <p14:creationId xmlns:p14="http://schemas.microsoft.com/office/powerpoint/2010/main" val="82450997"/>
       </p:ext>
     </p:extLst>
   </p:cSld>
@@ -1908,7 +1908,7 @@
           <p:cNvPr id="2" name="标题 1">
             <a:extLst>
               <a:ext uri="{FF2B5EF4-FFF2-40B4-BE49-F238E27FC236}">
-                <a16:creationId xmlns:a16="http://schemas.microsoft.com/office/drawing/2014/main" id="{AB022A7E-00E4-E2EC-0D77-F36CD2CCC270}"/>
+                <a16:creationId xmlns:a16="http://schemas.microsoft.com/office/drawing/2014/main" id="{7D546C23-E79F-4661-FB67-35AF4A6961BB}"/>
               </a:ext>
             </a:extLst>
           </p:cNvPr>
@@ -1936,7 +1936,7 @@
           <p:cNvPr id="3" name="日期占位符 2">
             <a:extLst>
               <a:ext uri="{FF2B5EF4-FFF2-40B4-BE49-F238E27FC236}">
-                <a16:creationId xmlns:a16="http://schemas.microsoft.com/office/drawing/2014/main" id="{0A276D37-37F5-5916-7FB8-E8FD3F9C6E41}"/>
+                <a16:creationId xmlns:a16="http://schemas.microsoft.com/office/drawing/2014/main" id="{9A1FFDCE-3A77-9D53-92DD-ED1103F18504}"/>
               </a:ext>
             </a:extLst>
           </p:cNvPr>
@@ -1952,7 +1952,7 @@
           <a:bodyPr/>
           <a:lstStyle/>
           <a:p>
-            <a:fld id="{6186168D-8DF3-47FC-AB94-349ED6DF78D0}" type="datetimeFigureOut">
+            <a:fld id="{02B252FC-AA1C-4F1E-9721-828FAE4A4236}" type="datetimeFigureOut">
               <a:rPr lang="zh-CN" altLang="en-US" smtClean="0"/>
               <a:t>2026/10/13</a:t>
             </a:fld>
@@ -1965,7 +1965,7 @@
           <p:cNvPr id="4" name="页脚占位符 3">
             <a:extLst>
               <a:ext uri="{FF2B5EF4-FFF2-40B4-BE49-F238E27FC236}">
-                <a16:creationId xmlns:a16="http://schemas.microsoft.com/office/drawing/2014/main" id="{673C1D53-9615-A118-7782-B39669112495}"/>
+                <a16:creationId xmlns:a16="http://schemas.microsoft.com/office/drawing/2014/main" id="{05FAA41B-7A20-F409-08CE-B78953CDA1D2}"/>
               </a:ext>
             </a:extLst>
           </p:cNvPr>
@@ -1990,7 +1990,7 @@
           <p:cNvPr id="5" name="灯片编号占位符 4">
             <a:extLst>
               <a:ext uri="{FF2B5EF4-FFF2-40B4-BE49-F238E27FC236}">
-                <a16:creationId xmlns:a16="http://schemas.microsoft.com/office/drawing/2014/main" id="{039C22AB-58DB-F3C6-27DA-24307EABB3C5}"/>
+                <a16:creationId xmlns:a16="http://schemas.microsoft.com/office/drawing/2014/main" id="{693C39CD-92DB-961D-901A-2800CE49ECAE}"/>
               </a:ext>
             </a:extLst>
           </p:cNvPr>
@@ -2006,7 +2006,7 @@
           <a:bodyPr/>
           <a:lstStyle/>
           <a:p>
-            <a:fld id="{B2ECA510-1031-4F61-8417-A119E1D3780D}" type="slidenum">
+            <a:fld id="{35817C98-D1C8-48AD-A323-35CFC4E74D14}" type="slidenum">
               <a:rPr lang="zh-CN" altLang="en-US" smtClean="0"/>
               <a:t>‹#›</a:t>
             </a:fld>
@@ -2017,7 +2017,7 @@
     </p:spTree>
     <p:extLst>
       <p:ext uri="{BB962C8B-B14F-4D97-AF65-F5344CB8AC3E}">
-        <p14:creationId xmlns:p14="http://schemas.microsoft.com/office/powerpoint/2010/main" val="673348945"/>
+        <p14:creationId xmlns:p14="http://schemas.microsoft.com/office/powerpoint/2010/main" val="2437240504"/>
       </p:ext>
     </p:extLst>
   </p:cSld>
@@ -2049,7 +2049,7 @@
           <p:cNvPr id="2" name="日期占位符 1">
             <a:extLst>
               <a:ext uri="{FF2B5EF4-FFF2-40B4-BE49-F238E27FC236}">
-                <a16:creationId xmlns:a16="http://schemas.microsoft.com/office/drawing/2014/main" id="{863D5D46-E690-7918-1C14-87BE689CD4A5}"/>
+                <a16:creationId xmlns:a16="http://schemas.microsoft.com/office/drawing/2014/main" id="{D58453E0-10A4-BC89-4094-14D00DA691DD}"/>
               </a:ext>
             </a:extLst>
           </p:cNvPr>
@@ -2065,7 +2065,7 @@
           <a:bodyPr/>
           <a:lstStyle/>
           <a:p>
-            <a:fld id="{6186168D-8DF3-47FC-AB94-349ED6DF78D0}" type="datetimeFigureOut">
+            <a:fld id="{02B252FC-AA1C-4F1E-9721-828FAE4A4236}" type="datetimeFigureOut">
               <a:rPr lang="zh-CN" altLang="en-US" smtClean="0"/>
               <a:t>2026/10/13</a:t>
             </a:fld>
@@ -2078,7 +2078,7 @@
           <p:cNvPr id="3" name="页脚占位符 2">
             <a:extLst>
               <a:ext uri="{FF2B5EF4-FFF2-40B4-BE49-F238E27FC236}">
-                <a16:creationId xmlns:a16="http://schemas.microsoft.com/office/drawing/2014/main" id="{961B8B0C-0932-CB0E-E739-5C92DC629238}"/>
+                <a16:creationId xmlns:a16="http://schemas.microsoft.com/office/drawing/2014/main" id="{127ABB09-4B5D-546F-4203-973671A8A140}"/>
               </a:ext>
             </a:extLst>
           </p:cNvPr>
@@ -2103,7 +2103,7 @@
           <p:cNvPr id="4" name="灯片编号占位符 3">
             <a:extLst>
               <a:ext uri="{FF2B5EF4-FFF2-40B4-BE49-F238E27FC236}">
-                <a16:creationId xmlns:a16="http://schemas.microsoft.com/office/drawing/2014/main" id="{2C5E0DE3-1BDC-E540-0B87-57F2C550B76E}"/>
+                <a16:creationId xmlns:a16="http://schemas.microsoft.com/office/drawing/2014/main" id="{703FC616-B972-60B6-2005-6A53724A6E82}"/>
               </a:ext>
             </a:extLst>
           </p:cNvPr>
@@ -2119,7 +2119,7 @@
           <a:bodyPr/>
           <a:lstStyle/>
           <a:p>
-            <a:fld id="{B2ECA510-1031-4F61-8417-A119E1D3780D}" type="slidenum">
+            <a:fld id="{35817C98-D1C8-48AD-A323-35CFC4E74D14}" type="slidenum">
               <a:rPr lang="zh-CN" altLang="en-US" smtClean="0"/>
               <a:t>‹#›</a:t>
             </a:fld>
@@ -2130,7 +2130,7 @@
     </p:spTree>
     <p:extLst>
       <p:ext uri="{BB962C8B-B14F-4D97-AF65-F5344CB8AC3E}">
-        <p14:creationId xmlns:p14="http://schemas.microsoft.com/office/powerpoint/2010/main" val="1479155413"/>
+        <p14:creationId xmlns:p14="http://schemas.microsoft.com/office/powerpoint/2010/main" val="595982958"/>
       </p:ext>
     </p:extLst>
   </p:cSld>
@@ -2162,7 +2162,7 @@
           <p:cNvPr id="2" name="标题 1">
             <a:extLst>
               <a:ext uri="{FF2B5EF4-FFF2-40B4-BE49-F238E27FC236}">
-                <a16:creationId xmlns:a16="http://schemas.microsoft.com/office/drawing/2014/main" id="{7FF705C6-7D84-DE43-9DC3-C2055EAD6B2D}"/>
+                <a16:creationId xmlns:a16="http://schemas.microsoft.com/office/drawing/2014/main" id="{B7AF1D75-EE19-A3D7-87E9-D08A93555409}"/>
               </a:ext>
             </a:extLst>
           </p:cNvPr>
@@ -2199,7 +2199,7 @@
           <p:cNvPr id="3" name="内容占位符 2">
             <a:extLst>
               <a:ext uri="{FF2B5EF4-FFF2-40B4-BE49-F238E27FC236}">
-                <a16:creationId xmlns:a16="http://schemas.microsoft.com/office/drawing/2014/main" id="{E404C89B-5B4F-4B98-61A6-BDC8D24B35F7}"/>
+                <a16:creationId xmlns:a16="http://schemas.microsoft.com/office/drawing/2014/main" id="{077455A8-D9C3-60FC-AA63-D91D1FC0AF6D}"/>
               </a:ext>
             </a:extLst>
           </p:cNvPr>
@@ -2289,7 +2289,7 @@
           <p:cNvPr id="4" name="文本占位符 3">
             <a:extLst>
               <a:ext uri="{FF2B5EF4-FFF2-40B4-BE49-F238E27FC236}">
-                <a16:creationId xmlns:a16="http://schemas.microsoft.com/office/drawing/2014/main" id="{0806BBBF-6F3C-B2BF-23D8-4981641A7140}"/>
+                <a16:creationId xmlns:a16="http://schemas.microsoft.com/office/drawing/2014/main" id="{346DADEE-CFE0-6E8C-41DA-CB80EB0A5468}"/>
               </a:ext>
             </a:extLst>
           </p:cNvPr>
@@ -2360,7 +2360,7 @@
           <p:cNvPr id="5" name="日期占位符 4">
             <a:extLst>
               <a:ext uri="{FF2B5EF4-FFF2-40B4-BE49-F238E27FC236}">
-                <a16:creationId xmlns:a16="http://schemas.microsoft.com/office/drawing/2014/main" id="{D0CECD3E-410D-E36A-AC69-95AB64934ADA}"/>
+                <a16:creationId xmlns:a16="http://schemas.microsoft.com/office/drawing/2014/main" id="{AD8DF272-D58C-EDD6-33B9-33FF0A25AC77}"/>
               </a:ext>
             </a:extLst>
           </p:cNvPr>
@@ -2376,7 +2376,7 @@
           <a:bodyPr/>
           <a:lstStyle/>
           <a:p>
-            <a:fld id="{6186168D-8DF3-47FC-AB94-349ED6DF78D0}" type="datetimeFigureOut">
+            <a:fld id="{02B252FC-AA1C-4F1E-9721-828FAE4A4236}" type="datetimeFigureOut">
               <a:rPr lang="zh-CN" altLang="en-US" smtClean="0"/>
               <a:t>2026/10/13</a:t>
             </a:fld>
@@ -2389,7 +2389,7 @@
           <p:cNvPr id="6" name="页脚占位符 5">
             <a:extLst>
               <a:ext uri="{FF2B5EF4-FFF2-40B4-BE49-F238E27FC236}">
-                <a16:creationId xmlns:a16="http://schemas.microsoft.com/office/drawing/2014/main" id="{DEDDC888-FAE8-7FEF-14CC-A8B97BAB160D}"/>
+                <a16:creationId xmlns:a16="http://schemas.microsoft.com/office/drawing/2014/main" id="{F7E33009-693B-B7B6-C102-0F71E7020F54}"/>
               </a:ext>
             </a:extLst>
           </p:cNvPr>
@@ -2414,7 +2414,7 @@
           <p:cNvPr id="7" name="灯片编号占位符 6">
             <a:extLst>
               <a:ext uri="{FF2B5EF4-FFF2-40B4-BE49-F238E27FC236}">
-                <a16:creationId xmlns:a16="http://schemas.microsoft.com/office/drawing/2014/main" id="{2C3F0DA1-5874-B50F-11C3-A5D8A844BAAE}"/>
+                <a16:creationId xmlns:a16="http://schemas.microsoft.com/office/drawing/2014/main" id="{2E080E3A-1894-39F9-A588-05682AC15C8B}"/>
               </a:ext>
             </a:extLst>
           </p:cNvPr>
@@ -2430,7 +2430,7 @@
           <a:bodyPr/>
           <a:lstStyle/>
           <a:p>
-            <a:fld id="{B2ECA510-1031-4F61-8417-A119E1D3780D}" type="slidenum">
+            <a:fld id="{35817C98-D1C8-48AD-A323-35CFC4E74D14}" type="slidenum">
               <a:rPr lang="zh-CN" altLang="en-US" smtClean="0"/>
               <a:t>‹#›</a:t>
             </a:fld>
@@ -2441,7 +2441,7 @@
     </p:spTree>
     <p:extLst>
       <p:ext uri="{BB962C8B-B14F-4D97-AF65-F5344CB8AC3E}">
-        <p14:creationId xmlns:p14="http://schemas.microsoft.com/office/powerpoint/2010/main" val="2441049359"/>
+        <p14:creationId xmlns:p14="http://schemas.microsoft.com/office/powerpoint/2010/main" val="2118051878"/>
       </p:ext>
     </p:extLst>
   </p:cSld>
@@ -2473,7 +2473,7 @@
           <p:cNvPr id="2" name="标题 1">
             <a:extLst>
               <a:ext uri="{FF2B5EF4-FFF2-40B4-BE49-F238E27FC236}">
-                <a16:creationId xmlns:a16="http://schemas.microsoft.com/office/drawing/2014/main" id="{B72FB70A-43DA-6B3E-6EF1-CDC90DD41CD4}"/>
+                <a16:creationId xmlns:a16="http://schemas.microsoft.com/office/drawing/2014/main" id="{4DA26276-FEFC-105E-858A-690EFB98D186}"/>
               </a:ext>
             </a:extLst>
           </p:cNvPr>
@@ -2510,7 +2510,7 @@
           <p:cNvPr id="3" name="图片占位符 2">
             <a:extLst>
               <a:ext uri="{FF2B5EF4-FFF2-40B4-BE49-F238E27FC236}">
-                <a16:creationId xmlns:a16="http://schemas.microsoft.com/office/drawing/2014/main" id="{098417E3-EE1B-F63E-1AEC-E2EA60382177}"/>
+                <a16:creationId xmlns:a16="http://schemas.microsoft.com/office/drawing/2014/main" id="{71A144CC-6C74-BCE4-FB2B-5958BE5F7E8B}"/>
               </a:ext>
             </a:extLst>
           </p:cNvPr>
@@ -2577,7 +2577,7 @@
           <p:cNvPr id="4" name="文本占位符 3">
             <a:extLst>
               <a:ext uri="{FF2B5EF4-FFF2-40B4-BE49-F238E27FC236}">
-                <a16:creationId xmlns:a16="http://schemas.microsoft.com/office/drawing/2014/main" id="{BFBC651F-BCF7-DE86-1DA0-F1C952210B04}"/>
+                <a16:creationId xmlns:a16="http://schemas.microsoft.com/office/drawing/2014/main" id="{DE8AF177-B87C-8684-63ED-ADBB352E60FE}"/>
               </a:ext>
             </a:extLst>
           </p:cNvPr>
@@ -2648,7 +2648,7 @@
           <p:cNvPr id="5" name="日期占位符 4">
             <a:extLst>
               <a:ext uri="{FF2B5EF4-FFF2-40B4-BE49-F238E27FC236}">
-                <a16:creationId xmlns:a16="http://schemas.microsoft.com/office/drawing/2014/main" id="{77433FF1-4CBE-AA32-13C6-0A8F383ABD0A}"/>
+                <a16:creationId xmlns:a16="http://schemas.microsoft.com/office/drawing/2014/main" id="{33590C65-5B42-D16F-CBB6-D17D9DAFCFEA}"/>
               </a:ext>
             </a:extLst>
           </p:cNvPr>
@@ -2664,7 +2664,7 @@
           <a:bodyPr/>
           <a:lstStyle/>
           <a:p>
-            <a:fld id="{6186168D-8DF3-47FC-AB94-349ED6DF78D0}" type="datetimeFigureOut">
+            <a:fld id="{02B252FC-AA1C-4F1E-9721-828FAE4A4236}" type="datetimeFigureOut">
               <a:rPr lang="zh-CN" altLang="en-US" smtClean="0"/>
               <a:t>2026/10/13</a:t>
             </a:fld>
@@ -2677,7 +2677,7 @@
           <p:cNvPr id="6" name="页脚占位符 5">
             <a:extLst>
               <a:ext uri="{FF2B5EF4-FFF2-40B4-BE49-F238E27FC236}">
-                <a16:creationId xmlns:a16="http://schemas.microsoft.com/office/drawing/2014/main" id="{7082C6CE-146C-1A25-98A3-FCDD502FFB76}"/>
+                <a16:creationId xmlns:a16="http://schemas.microsoft.com/office/drawing/2014/main" id="{57031EC6-227E-F356-224E-DE6A4D3A9345}"/>
               </a:ext>
             </a:extLst>
           </p:cNvPr>
@@ -2702,7 +2702,7 @@
           <p:cNvPr id="7" name="灯片编号占位符 6">
             <a:extLst>
               <a:ext uri="{FF2B5EF4-FFF2-40B4-BE49-F238E27FC236}">
-                <a16:creationId xmlns:a16="http://schemas.microsoft.com/office/drawing/2014/main" id="{1E1F570E-C2AE-B30C-AA0B-052FB8A6CB9F}"/>
+                <a16:creationId xmlns:a16="http://schemas.microsoft.com/office/drawing/2014/main" id="{B7E2D769-8AB1-5FC8-7DF1-32EA5803497D}"/>
               </a:ext>
             </a:extLst>
           </p:cNvPr>
@@ -2718,7 +2718,7 @@
           <a:bodyPr/>
           <a:lstStyle/>
           <a:p>
-            <a:fld id="{B2ECA510-1031-4F61-8417-A119E1D3780D}" type="slidenum">
+            <a:fld id="{35817C98-D1C8-48AD-A323-35CFC4E74D14}" type="slidenum">
               <a:rPr lang="zh-CN" altLang="en-US" smtClean="0"/>
               <a:t>‹#›</a:t>
             </a:fld>
@@ -2729,7 +2729,7 @@
     </p:spTree>
     <p:extLst>
       <p:ext uri="{BB962C8B-B14F-4D97-AF65-F5344CB8AC3E}">
-        <p14:creationId xmlns:p14="http://schemas.microsoft.com/office/powerpoint/2010/main" val="2459946099"/>
+        <p14:creationId xmlns:p14="http://schemas.microsoft.com/office/powerpoint/2010/main" val="880475462"/>
       </p:ext>
     </p:extLst>
   </p:cSld>
@@ -2766,7 +2766,7 @@
           <p:cNvPr id="2" name="标题占位符 1">
             <a:extLst>
               <a:ext uri="{FF2B5EF4-FFF2-40B4-BE49-F238E27FC236}">
-                <a16:creationId xmlns:a16="http://schemas.microsoft.com/office/drawing/2014/main" id="{52061B5F-FAC0-AD00-7FDC-52E7F7C5CE58}"/>
+                <a16:creationId xmlns:a16="http://schemas.microsoft.com/office/drawing/2014/main" id="{E68B686A-E557-233D-45C4-10CD41D1912C}"/>
               </a:ext>
             </a:extLst>
           </p:cNvPr>
@@ -2804,7 +2804,7 @@
           <p:cNvPr id="3" name="文本占位符 2">
             <a:extLst>
               <a:ext uri="{FF2B5EF4-FFF2-40B4-BE49-F238E27FC236}">
-                <a16:creationId xmlns:a16="http://schemas.microsoft.com/office/drawing/2014/main" id="{ED3529DD-E1F2-B9FB-29F5-3A447894E8CD}"/>
+                <a16:creationId xmlns:a16="http://schemas.microsoft.com/office/drawing/2014/main" id="{32C17119-544D-CA46-0980-3942CF4C9594}"/>
               </a:ext>
             </a:extLst>
           </p:cNvPr>
@@ -2871,7 +2871,7 @@
           <p:cNvPr id="4" name="日期占位符 3">
             <a:extLst>
               <a:ext uri="{FF2B5EF4-FFF2-40B4-BE49-F238E27FC236}">
-                <a16:creationId xmlns:a16="http://schemas.microsoft.com/office/drawing/2014/main" id="{74E86C2C-7E05-5FF0-B406-D4D27E8E9BA3}"/>
+                <a16:creationId xmlns:a16="http://schemas.microsoft.com/office/drawing/2014/main" id="{DA3B7E4B-23DD-0BC7-6749-89353EEB2AE3}"/>
               </a:ext>
             </a:extLst>
           </p:cNvPr>
@@ -2905,7 +2905,7 @@
             </a:lvl1pPr>
           </a:lstStyle>
           <a:p>
-            <a:fld id="{6186168D-8DF3-47FC-AB94-349ED6DF78D0}" type="datetimeFigureOut">
+            <a:fld id="{02B252FC-AA1C-4F1E-9721-828FAE4A4236}" type="datetimeFigureOut">
               <a:rPr lang="zh-CN" altLang="en-US" smtClean="0"/>
               <a:t>2026/10/13</a:t>
             </a:fld>
@@ -2918,7 +2918,7 @@
           <p:cNvPr id="5" name="页脚占位符 4">
             <a:extLst>
               <a:ext uri="{FF2B5EF4-FFF2-40B4-BE49-F238E27FC236}">
-                <a16:creationId xmlns:a16="http://schemas.microsoft.com/office/drawing/2014/main" id="{A153D982-E2B3-30AB-5955-C0BAD38B57A2}"/>
+                <a16:creationId xmlns:a16="http://schemas.microsoft.com/office/drawing/2014/main" id="{BF7E8EED-560D-47E7-F13E-D17390FF061D}"/>
               </a:ext>
             </a:extLst>
           </p:cNvPr>
@@ -2961,7 +2961,7 @@
           <p:cNvPr id="6" name="灯片编号占位符 5">
             <a:extLst>
               <a:ext uri="{FF2B5EF4-FFF2-40B4-BE49-F238E27FC236}">
-                <a16:creationId xmlns:a16="http://schemas.microsoft.com/office/drawing/2014/main" id="{9CDEFA2A-9339-10FF-AB6D-74E9DE4E80E1}"/>
+                <a16:creationId xmlns:a16="http://schemas.microsoft.com/office/drawing/2014/main" id="{257708FC-8452-2042-E579-0577AFBA9491}"/>
               </a:ext>
             </a:extLst>
           </p:cNvPr>
@@ -2995,7 +2995,7 @@
             </a:lvl1pPr>
           </a:lstStyle>
           <a:p>
-            <a:fld id="{B2ECA510-1031-4F61-8417-A119E1D3780D}" type="slidenum">
+            <a:fld id="{35817C98-D1C8-48AD-A323-35CFC4E74D14}" type="slidenum">
               <a:rPr lang="zh-CN" altLang="en-US" smtClean="0"/>
               <a:t>‹#›</a:t>
             </a:fld>
@@ -3006,7 +3006,7 @@
     </p:spTree>
     <p:extLst>
       <p:ext uri="{BB962C8B-B14F-4D97-AF65-F5344CB8AC3E}">
-        <p14:creationId xmlns:p14="http://schemas.microsoft.com/office/powerpoint/2010/main" val="3947009956"/>
+        <p14:creationId xmlns:p14="http://schemas.microsoft.com/office/powerpoint/2010/main" val="2542764428"/>
       </p:ext>
     </p:extLst>
   </p:cSld>
@@ -3329,7 +3329,7 @@
           <p:cNvPr id="2" name="文本框 1">
             <a:extLst>
               <a:ext uri="{FF2B5EF4-FFF2-40B4-BE49-F238E27FC236}">
-                <a16:creationId xmlns:a16="http://schemas.microsoft.com/office/drawing/2014/main" id="{E4292337-CD5B-4229-B3FC-28D0196181F3}"/>
+                <a16:creationId xmlns:a16="http://schemas.microsoft.com/office/drawing/2014/main" id="{D74A7024-0FA7-785B-25F1-FDC7F92E5C5B}"/>
               </a:ext>
             </a:extLst>
           </p:cNvPr>
@@ -3387,7 +3387,7 @@
             <a:hlinkClick r:id="" action="ppaction://media"/>
             <a:extLst>
               <a:ext uri="{FF2B5EF4-FFF2-40B4-BE49-F238E27FC236}">
-                <a16:creationId xmlns:a16="http://schemas.microsoft.com/office/drawing/2014/main" id="{B9CBF296-0C90-603F-CD5E-88BAA88D8651}"/>
+                <a16:creationId xmlns:a16="http://schemas.microsoft.com/office/drawing/2014/main" id="{F25BBD73-A429-62A3-6A2C-AADD72F68A47}"/>
               </a:ext>
             </a:extLst>
           </p:cNvPr>
@@ -3395,10 +3395,12 @@
             <a:picLocks noChangeAspect="1"/>
           </p:cNvPicPr>
           <p:nvPr>
-            <a:audioFile r:link="rId2"/>
+            <a:audioFile r:link="rId1"/>
             <p:extLst>
               <p:ext uri="{DAA4B4D4-6D71-4841-9C94-3DE7FCFB9230}">
-                <p14:media xmlns:p14="http://schemas.microsoft.com/office/powerpoint/2010/main" r:embed="rId1"/>
+                <p14:media xmlns:p14="http://schemas.microsoft.com/office/powerpoint/2010/main" r:embed="rId2">
+                  <p14:trim st="300" end="200"/>
+                </p14:media>
               </p:ext>
             </p:extLst>
           </p:nvPr>
@@ -3422,7 +3424,7 @@
     </p:spTree>
     <p:extLst>
       <p:ext uri="{BB962C8B-B14F-4D97-AF65-F5344CB8AC3E}">
-        <p14:creationId xmlns:p14="http://schemas.microsoft.com/office/powerpoint/2010/main" val="733412778"/>
+        <p14:creationId xmlns:p14="http://schemas.microsoft.com/office/powerpoint/2010/main" val="2183472144"/>
       </p:ext>
     </p:extLst>
   </p:cSld>
@@ -3538,7 +3540,7 @@
           <p:cNvPr id="2" name="文本框 1">
             <a:extLst>
               <a:ext uri="{FF2B5EF4-FFF2-40B4-BE49-F238E27FC236}">
-                <a16:creationId xmlns:a16="http://schemas.microsoft.com/office/drawing/2014/main" id="{5B432FAA-A861-81CE-B1F7-FCF90A2DAF7D}"/>
+                <a16:creationId xmlns:a16="http://schemas.microsoft.com/office/drawing/2014/main" id="{05E5F4D4-05F7-7925-4F11-AC188CA5BCD6}"/>
               </a:ext>
             </a:extLst>
           </p:cNvPr>
@@ -3593,7 +3595,7 @@
     </p:spTree>
     <p:extLst>
       <p:ext uri="{BB962C8B-B14F-4D97-AF65-F5344CB8AC3E}">
-        <p14:creationId xmlns:p14="http://schemas.microsoft.com/office/powerpoint/2010/main" val="2408486391"/>
+        <p14:creationId xmlns:p14="http://schemas.microsoft.com/office/powerpoint/2010/main" val="2437578966"/>
       </p:ext>
     </p:extLst>
   </p:cSld>
@@ -3625,7 +3627,7 @@
           <p:cNvPr id="2" name="文本框 1">
             <a:extLst>
               <a:ext uri="{FF2B5EF4-FFF2-40B4-BE49-F238E27FC236}">
-                <a16:creationId xmlns:a16="http://schemas.microsoft.com/office/drawing/2014/main" id="{1BEC0627-FBDD-88D3-923F-53832E7443B0}"/>
+                <a16:creationId xmlns:a16="http://schemas.microsoft.com/office/drawing/2014/main" id="{F60B463E-DC5F-A3BD-100E-B0B61AC8A9EC}"/>
               </a:ext>
             </a:extLst>
           </p:cNvPr>
@@ -3680,7 +3682,7 @@
     </p:spTree>
     <p:extLst>
       <p:ext uri="{BB962C8B-B14F-4D97-AF65-F5344CB8AC3E}">
-        <p14:creationId xmlns:p14="http://schemas.microsoft.com/office/powerpoint/2010/main" val="840730634"/>
+        <p14:creationId xmlns:p14="http://schemas.microsoft.com/office/powerpoint/2010/main" val="2339263958"/>
       </p:ext>
     </p:extLst>
   </p:cSld>
@@ -3712,7 +3714,7 @@
           <p:cNvPr id="2" name="文本框 1">
             <a:extLst>
               <a:ext uri="{FF2B5EF4-FFF2-40B4-BE49-F238E27FC236}">
-                <a16:creationId xmlns:a16="http://schemas.microsoft.com/office/drawing/2014/main" id="{59736D2B-B9B4-E122-88AD-FFC25037B8CC}"/>
+                <a16:creationId xmlns:a16="http://schemas.microsoft.com/office/drawing/2014/main" id="{A1EE4053-2C53-3F7E-8F4E-F3A2E19100C0}"/>
               </a:ext>
             </a:extLst>
           </p:cNvPr>
@@ -3767,7 +3769,7 @@
     </p:spTree>
     <p:extLst>
       <p:ext uri="{BB962C8B-B14F-4D97-AF65-F5344CB8AC3E}">
-        <p14:creationId xmlns:p14="http://schemas.microsoft.com/office/powerpoint/2010/main" val="1573951387"/>
+        <p14:creationId xmlns:p14="http://schemas.microsoft.com/office/powerpoint/2010/main" val="1519128116"/>
       </p:ext>
     </p:extLst>
   </p:cSld>
